--- a/slides/第01回_計算とは何か.pptx
+++ b/slides/第01回_計算とは何か.pptx
@@ -3640,7 +3640,7 @@
             <a:r>
               <a:rPr lang="en-US" sz="1200" dirty="0">
                 <a:solidFill>
-                  <a:srgbClr val="5F6672"/>
+                  <a:srgbClr val="9AA3B0"/>
                 </a:solidFill>
                 <a:latin typeface="Yu Gothic" pitchFamily="34" charset="0"/>
                 <a:ea typeface="Yu Gothic" pitchFamily="34" charset="-122"/>
@@ -5443,7 +5443,7 @@
       </p:sp>
       <p:pic>
         <p:nvPicPr>
-          <p:cNvPr id="4" name="Image 0" descr="/private/tmp/claude-501/-Users-koide-Documents-Playground-lune-v0-1/b97ef6c6-3431-43e3-9c6d-bf752bde035b/scratchpad/deck/png/fig-01-02.png">    </p:cNvPr>
+          <p:cNvPr id="4" name="Image 0" descr="/Users/koide/Documents/Playground/CompOutline/slides/png/fig-01-02.png">    </p:cNvPr>
           <p:cNvPicPr>
             <a:picLocks noChangeAspect="1"/>
           </p:cNvPicPr>
@@ -8461,7 +8461,7 @@
       </p:sp>
       <p:pic>
         <p:nvPicPr>
-          <p:cNvPr id="4" name="Image 0" descr="/private/tmp/claude-501/-Users-koide-Documents-Playground-lune-v0-1/b97ef6c6-3431-43e3-9c6d-bf752bde035b/scratchpad/deck/png/fig-01-03.png">    </p:cNvPr>
+          <p:cNvPr id="4" name="Image 0" descr="/Users/koide/Documents/Playground/CompOutline/slides/png/fig-01-03.png">    </p:cNvPr>
           <p:cNvPicPr>
             <a:picLocks noChangeAspect="1"/>
           </p:cNvPicPr>
@@ -12430,7 +12430,7 @@
       </p:sp>
       <p:pic>
         <p:nvPicPr>
-          <p:cNvPr id="4" name="Image 0" descr="/private/tmp/claude-501/-Users-koide-Documents-Playground-lune-v0-1/b97ef6c6-3431-43e3-9c6d-bf752bde035b/scratchpad/deck/png/fig-01-04.png">    </p:cNvPr>
+          <p:cNvPr id="4" name="Image 0" descr="/Users/koide/Documents/Playground/CompOutline/slides/png/fig-01-04.png">    </p:cNvPr>
           <p:cNvPicPr>
             <a:picLocks noChangeAspect="1"/>
           </p:cNvPicPr>
@@ -12444,8 +12444,8 @@
         </p:blipFill>
         <p:spPr>
           <a:xfrm>
-            <a:off x="3703320" y="1371600"/>
-            <a:ext cx="4754880" cy="3054096"/>
+            <a:off x="3364992" y="1325880"/>
+            <a:ext cx="5440680" cy="3493008"/>
           </a:xfrm>
           <a:prstGeom prst="rect">
             <a:avLst/>
@@ -12460,7 +12460,7 @@
         </p:nvSpPr>
         <p:spPr>
           <a:xfrm>
-            <a:off x="685800" y="4663440"/>
+            <a:off x="685800" y="4983480"/>
             <a:ext cx="10789920" cy="365760"/>
           </a:xfrm>
           <a:prstGeom prst="rect">
@@ -12499,7 +12499,7 @@
         </p:nvSpPr>
         <p:spPr>
           <a:xfrm>
-            <a:off x="685800" y="5120640"/>
+            <a:off x="685800" y="5394960"/>
             <a:ext cx="10789920" cy="640080"/>
           </a:xfrm>
           <a:prstGeom prst="rect">
@@ -12791,7 +12791,7 @@
             <a:r>
               <a:rPr lang="en-US" sz="1400" dirty="0">
                 <a:solidFill>
-                  <a:srgbClr val="5F6672"/>
+                  <a:srgbClr val="9AA3B0"/>
                 </a:solidFill>
                 <a:latin typeface="Yu Gothic" pitchFamily="34" charset="0"/>
                 <a:ea typeface="Yu Gothic" pitchFamily="34" charset="-122"/>
@@ -15308,7 +15308,7 @@
             <a:r>
               <a:rPr lang="en-US" sz="1300" dirty="0">
                 <a:solidFill>
-                  <a:srgbClr val="5F6672"/>
+                  <a:srgbClr val="9AA3B0"/>
                 </a:solidFill>
                 <a:latin typeface="Yu Gothic" pitchFamily="34" charset="0"/>
                 <a:ea typeface="Yu Gothic" pitchFamily="34" charset="-122"/>
@@ -20511,7 +20511,7 @@
       </p:sp>
       <p:pic>
         <p:nvPicPr>
-          <p:cNvPr id="4" name="Image 0" descr="/private/tmp/claude-501/-Users-koide-Documents-Playground-lune-v0-1/b97ef6c6-3431-43e3-9c6d-bf752bde035b/scratchpad/deck/png/fig-01-01.png">    </p:cNvPr>
+          <p:cNvPr id="4" name="Image 0" descr="/Users/koide/Documents/Playground/CompOutline/slides/png/fig-01-01.png">    </p:cNvPr>
           <p:cNvPicPr>
             <a:picLocks noChangeAspect="1"/>
           </p:cNvPicPr>
@@ -21106,11 +21106,11 @@
         <p:spPr>
           <a:xfrm>
             <a:off x="5852160" y="3154680"/>
-            <a:ext cx="5623560" cy="914400"/>
+            <a:ext cx="5623560" cy="1005840"/>
           </a:xfrm>
           <a:prstGeom prst="roundRect">
             <a:avLst>
-              <a:gd name="adj" fmla="val 6000"/>
+              <a:gd name="adj" fmla="val 5455"/>
             </a:avLst>
           </a:prstGeom>
           <a:solidFill>
@@ -21132,7 +21132,7 @@
         </p:nvSpPr>
         <p:spPr>
           <a:xfrm>
-            <a:off x="6053328" y="3291840"/>
+            <a:off x="6053328" y="3310128"/>
             <a:ext cx="5212080" cy="320040"/>
           </a:xfrm>
           <a:prstGeom prst="rect">
@@ -21149,7 +21149,7 @@
               <a:buNone/>
             </a:pPr>
             <a:r>
-              <a:rPr lang="en-US" sz="1400" b="1" dirty="0">
+              <a:rPr lang="en-US" sz="1500" b="1" dirty="0">
                 <a:solidFill>
                   <a:srgbClr val="0B5CAD"/>
                 </a:solidFill>
@@ -21157,9 +21157,9 @@
                 <a:ea typeface="Yu Gothic" pitchFamily="34" charset="-122"/>
                 <a:cs typeface="Yu Gothic" pitchFamily="34" charset="-120"/>
               </a:rPr>
-              <a:t>すべての n について終わるかは、2026年現在も証明されていない</a:t>
-            </a:r>
-            <a:endParaRPr lang="en-US" sz="1400" dirty="0"/>
+              <a:t>すべての n で終わるかは、未解決</a:t>
+            </a:r>
+            <a:endParaRPr lang="en-US" sz="1500" dirty="0"/>
           </a:p>
         </p:txBody>
       </p:sp>
@@ -21171,8 +21171,8 @@
         </p:nvSpPr>
         <p:spPr>
           <a:xfrm>
-            <a:off x="6053328" y="3639312"/>
-            <a:ext cx="5212080" cy="274320"/>
+            <a:off x="6053328" y="3694176"/>
+            <a:ext cx="5212080" cy="292608"/>
           </a:xfrm>
           <a:prstGeom prst="rect">
             <a:avLst/>
@@ -21196,7 +21196,7 @@
                 <a:ea typeface="Yu Gothic" pitchFamily="34" charset="-122"/>
                 <a:cs typeface="Yu Gothic" pitchFamily="34" charset="-120"/>
               </a:rPr>
-              <a:t>1937年に提起されて以来、未解決。</a:t>
+              <a:t>1937年に提起されて以来、2026年現在も証明されていない。</a:t>
             </a:r>
             <a:endParaRPr lang="en-US" sz="1200" dirty="0"/>
           </a:p>

--- a/slides/第01回_計算とは何か.pptx
+++ b/slides/第01回_計算とは何か.pptx
@@ -13564,7 +13564,7 @@
                 <a:ea typeface="Yu Gothic" pitchFamily="34" charset="-122"/>
                 <a:cs typeface="Yu Gothic" pitchFamily="34" charset="-120"/>
               </a:rPr>
-              <a:t>小出 洋（こいで ひろし）</a:t>
+              <a:t>小出 洋（こいで ひろし）　情報基盤研究開発センター　情報システムセキュリティ研究部門</a:t>
             </a:r>
             <a:endParaRPr lang="en-US" sz="1500" dirty="0"/>
           </a:p>
@@ -13579,11 +13579,119 @@
         <p:spPr>
           <a:xfrm>
             <a:off x="685800" y="1883664"/>
-            <a:ext cx="3444240" cy="1234440"/>
+            <a:ext cx="3444240" cy="1737360"/>
           </a:xfrm>
           <a:prstGeom prst="roundRect">
             <a:avLst>
-              <a:gd name="adj" fmla="val 4444"/>
+              <a:gd name="adj" fmla="val 3158"/>
+            </a:avLst>
+          </a:prstGeom>
+          <a:solidFill>
+            <a:srgbClr val="D9E6F4"/>
+          </a:solidFill>
+          <a:ln w="12700">
+            <a:solidFill>
+              <a:srgbClr val="0B5CAD"/>
+            </a:solidFill>
+            <a:prstDash val="solid"/>
+          </a:ln>
+        </p:spPr>
+      </p:sp>
+      <p:sp>
+        <p:nvSpPr>
+          <p:cNvPr id="7" name="Text 5"/>
+          <p:cNvSpPr/>
+          <p:nvPr/>
+        </p:nvSpPr>
+        <p:spPr>
+          <a:xfrm>
+            <a:off x="868680" y="2020824"/>
+            <a:ext cx="3078480" cy="310896"/>
+          </a:xfrm>
+          <a:prstGeom prst="rect">
+            <a:avLst/>
+          </a:prstGeom>
+          <a:noFill/>
+          <a:ln/>
+        </p:spPr>
+        <p:txBody>
+          <a:bodyPr wrap="square" lIns="0" tIns="0" rIns="0" bIns="0" rtlCol="0" anchor="ctr"/>
+          <a:lstStyle/>
+          <a:p>
+            <a:pPr indent="0" marL="0">
+              <a:buNone/>
+            </a:pPr>
+            <a:r>
+              <a:rPr lang="en-US" sz="1400" b="1" dirty="0">
+                <a:solidFill>
+                  <a:srgbClr val="0B5CAD"/>
+                </a:solidFill>
+                <a:latin typeface="Yu Gothic" pitchFamily="34" charset="0"/>
+                <a:ea typeface="Yu Gothic" pitchFamily="34" charset="-122"/>
+                <a:cs typeface="Yu Gothic" pitchFamily="34" charset="-120"/>
+              </a:rPr>
+              <a:t>研究</a:t>
+            </a:r>
+            <a:endParaRPr lang="en-US" sz="1400" dirty="0"/>
+          </a:p>
+        </p:txBody>
+      </p:sp>
+      <p:sp>
+        <p:nvSpPr>
+          <p:cNvPr id="8" name="Text 6"/>
+          <p:cNvSpPr/>
+          <p:nvPr/>
+        </p:nvSpPr>
+        <p:spPr>
+          <a:xfrm>
+            <a:off x="868680" y="2368296"/>
+            <a:ext cx="3078480" cy="1097280"/>
+          </a:xfrm>
+          <a:prstGeom prst="rect">
+            <a:avLst/>
+          </a:prstGeom>
+          <a:noFill/>
+          <a:ln/>
+        </p:spPr>
+        <p:txBody>
+          <a:bodyPr wrap="square" lIns="0" tIns="0" rIns="0" bIns="0" rtlCol="0" anchor="t"/>
+          <a:lstStyle/>
+          <a:p>
+            <a:pPr indent="0" marL="0">
+              <a:lnSpc>
+                <a:spcPts val="1600"/>
+              </a:lnSpc>
+              <a:buNone/>
+            </a:pPr>
+            <a:r>
+              <a:rPr lang="en-US" sz="1200" dirty="0">
+                <a:solidFill>
+                  <a:srgbClr val="5F6672"/>
+                </a:solidFill>
+                <a:latin typeface="Yu Gothic" pitchFamily="34" charset="0"/>
+                <a:ea typeface="Yu Gothic" pitchFamily="34" charset="-122"/>
+                <a:cs typeface="Yu Gothic" pitchFamily="34" charset="-120"/>
+              </a:rPr>
+              <a:t>サイバーセキュリティ。攻撃を受けたときに被害を小さくする仕組みと、攻撃そのものを見つける仕組み。Moving Target Defense、攻撃検知と防御、IoT 機器の安全性、脅威追跡（Threat Trace）</a:t>
+            </a:r>
+            <a:endParaRPr lang="en-US" sz="1200" dirty="0"/>
+          </a:p>
+        </p:txBody>
+      </p:sp>
+      <p:sp>
+        <p:nvSpPr>
+          <p:cNvPr id="9" name="Shape 7"/>
+          <p:cNvSpPr/>
+          <p:nvPr/>
+        </p:nvSpPr>
+        <p:spPr>
+          <a:xfrm>
+            <a:off x="4358640" y="1883664"/>
+            <a:ext cx="3444240" cy="1737360"/>
+          </a:xfrm>
+          <a:prstGeom prst="roundRect">
+            <a:avLst>
+              <a:gd name="adj" fmla="val 3158"/>
             </a:avLst>
           </a:prstGeom>
           <a:solidFill>
@@ -13599,13 +13707,13 @@
       </p:sp>
       <p:sp>
         <p:nvSpPr>
-          <p:cNvPr id="7" name="Text 5"/>
-          <p:cNvSpPr/>
-          <p:nvPr/>
-        </p:nvSpPr>
-        <p:spPr>
-          <a:xfrm>
-            <a:off x="868680" y="2020824"/>
+          <p:cNvPr id="10" name="Text 8"/>
+          <p:cNvSpPr/>
+          <p:nvPr/>
+        </p:nvSpPr>
+        <p:spPr>
+          <a:xfrm>
+            <a:off x="4541520" y="2020824"/>
             <a:ext cx="3078480" cy="310896"/>
           </a:xfrm>
           <a:prstGeom prst="rect">
@@ -13630,7 +13738,7 @@
                 <a:ea typeface="Yu Gothic" pitchFamily="34" charset="-122"/>
                 <a:cs typeface="Yu Gothic" pitchFamily="34" charset="-120"/>
               </a:rPr>
-              <a:t>研究</a:t>
+              <a:t>実務</a:t>
             </a:r>
             <a:endParaRPr lang="en-US" sz="1400" dirty="0"/>
           </a:p>
@@ -13638,14 +13746,14 @@
       </p:sp>
       <p:sp>
         <p:nvSpPr>
-          <p:cNvPr id="8" name="Text 6"/>
-          <p:cNvSpPr/>
-          <p:nvPr/>
-        </p:nvSpPr>
-        <p:spPr>
-          <a:xfrm>
-            <a:off x="868680" y="2368296"/>
-            <a:ext cx="3078480" cy="594360"/>
+          <p:cNvPr id="11" name="Text 9"/>
+          <p:cNvSpPr/>
+          <p:nvPr/>
+        </p:nvSpPr>
+        <p:spPr>
+          <a:xfrm>
+            <a:off x="4541520" y="2368296"/>
+            <a:ext cx="3078480" cy="1097280"/>
           </a:xfrm>
           <a:prstGeom prst="rect">
             <a:avLst/>
@@ -13672,7 +13780,7 @@
                 <a:ea typeface="Yu Gothic" pitchFamily="34" charset="-122"/>
                 <a:cs typeface="Yu Gothic" pitchFamily="34" charset="-120"/>
               </a:rPr>
-              <a:t>［要記入］</a:t>
+              <a:t>福岡県警察 サイバー犯罪対策テクニカルアドバイザー　［要確認：現況］</a:t>
             </a:r>
             <a:endParaRPr lang="en-US" sz="1200" dirty="0"/>
           </a:p>
@@ -13680,18 +13788,18 @@
       </p:sp>
       <p:sp>
         <p:nvSpPr>
-          <p:cNvPr id="9" name="Shape 7"/>
-          <p:cNvSpPr/>
-          <p:nvPr/>
-        </p:nvSpPr>
-        <p:spPr>
-          <a:xfrm>
-            <a:off x="4358640" y="1883664"/>
-            <a:ext cx="3444240" cy="1234440"/>
+          <p:cNvPr id="12" name="Shape 10"/>
+          <p:cNvSpPr/>
+          <p:nvPr/>
+        </p:nvSpPr>
+        <p:spPr>
+          <a:xfrm>
+            <a:off x="8031480" y="1883664"/>
+            <a:ext cx="3444240" cy="1737360"/>
           </a:xfrm>
           <a:prstGeom prst="roundRect">
             <a:avLst>
-              <a:gd name="adj" fmla="val 4444"/>
+              <a:gd name="adj" fmla="val 3158"/>
             </a:avLst>
           </a:prstGeom>
           <a:solidFill>
@@ -13707,13 +13815,13 @@
       </p:sp>
       <p:sp>
         <p:nvSpPr>
-          <p:cNvPr id="10" name="Text 8"/>
-          <p:cNvSpPr/>
-          <p:nvPr/>
-        </p:nvSpPr>
-        <p:spPr>
-          <a:xfrm>
-            <a:off x="4541520" y="2020824"/>
+          <p:cNvPr id="13" name="Text 11"/>
+          <p:cNvSpPr/>
+          <p:nvPr/>
+        </p:nvSpPr>
+        <p:spPr>
+          <a:xfrm>
+            <a:off x="8214360" y="2020824"/>
             <a:ext cx="3078480" cy="310896"/>
           </a:xfrm>
           <a:prstGeom prst="rect">
@@ -13738,7 +13846,7 @@
                 <a:ea typeface="Yu Gothic" pitchFamily="34" charset="-122"/>
                 <a:cs typeface="Yu Gothic" pitchFamily="34" charset="-120"/>
               </a:rPr>
-              <a:t>実務</a:t>
+              <a:t>CTF</a:t>
             </a:r>
             <a:endParaRPr lang="en-US" sz="1400" dirty="0"/>
           </a:p>
@@ -13746,14 +13854,14 @@
       </p:sp>
       <p:sp>
         <p:nvSpPr>
-          <p:cNvPr id="11" name="Text 9"/>
-          <p:cNvSpPr/>
-          <p:nvPr/>
-        </p:nvSpPr>
-        <p:spPr>
-          <a:xfrm>
-            <a:off x="4541520" y="2368296"/>
-            <a:ext cx="3078480" cy="594360"/>
+          <p:cNvPr id="14" name="Text 12"/>
+          <p:cNvSpPr/>
+          <p:nvPr/>
+        </p:nvSpPr>
+        <p:spPr>
+          <a:xfrm>
+            <a:off x="8214360" y="2368296"/>
+            <a:ext cx="3078480" cy="1097280"/>
           </a:xfrm>
           <a:prstGeom prst="rect">
             <a:avLst/>
@@ -13780,7 +13888,7 @@
                 <a:ea typeface="Yu Gothic" pitchFamily="34" charset="-122"/>
                 <a:cs typeface="Yu Gothic" pitchFamily="34" charset="-120"/>
               </a:rPr>
-              <a:t>福岡県警察 サイバー犯罪対策テクニカルアドバイザー　［要確認：現況］</a:t>
+              <a:t>SECCON（セキュリティ技術を競う競技会）　［要確認：現況］</a:t>
             </a:r>
             <a:endParaRPr lang="en-US" sz="1200" dirty="0"/>
           </a:p>
@@ -13788,121 +13896,13 @@
       </p:sp>
       <p:sp>
         <p:nvSpPr>
-          <p:cNvPr id="12" name="Shape 10"/>
-          <p:cNvSpPr/>
-          <p:nvPr/>
-        </p:nvSpPr>
-        <p:spPr>
-          <a:xfrm>
-            <a:off x="8031480" y="1883664"/>
-            <a:ext cx="3444240" cy="1234440"/>
-          </a:xfrm>
-          <a:prstGeom prst="roundRect">
-            <a:avLst>
-              <a:gd name="adj" fmla="val 4444"/>
-            </a:avLst>
-          </a:prstGeom>
-          <a:solidFill>
-            <a:srgbClr val="EEF1F5"/>
-          </a:solidFill>
-          <a:ln w="12700">
-            <a:solidFill>
-              <a:srgbClr val="DDE4EC"/>
-            </a:solidFill>
-            <a:prstDash val="solid"/>
-          </a:ln>
-        </p:spPr>
-      </p:sp>
-      <p:sp>
-        <p:nvSpPr>
-          <p:cNvPr id="13" name="Text 11"/>
-          <p:cNvSpPr/>
-          <p:nvPr/>
-        </p:nvSpPr>
-        <p:spPr>
-          <a:xfrm>
-            <a:off x="8214360" y="2020824"/>
-            <a:ext cx="3078480" cy="310896"/>
-          </a:xfrm>
-          <a:prstGeom prst="rect">
-            <a:avLst/>
-          </a:prstGeom>
-          <a:noFill/>
-          <a:ln/>
-        </p:spPr>
-        <p:txBody>
-          <a:bodyPr wrap="square" lIns="0" tIns="0" rIns="0" bIns="0" rtlCol="0" anchor="ctr"/>
-          <a:lstStyle/>
-          <a:p>
-            <a:pPr indent="0" marL="0">
-              <a:buNone/>
-            </a:pPr>
-            <a:r>
-              <a:rPr lang="en-US" sz="1400" b="1" dirty="0">
-                <a:solidFill>
-                  <a:srgbClr val="16191D"/>
-                </a:solidFill>
-                <a:latin typeface="Yu Gothic" pitchFamily="34" charset="0"/>
-                <a:ea typeface="Yu Gothic" pitchFamily="34" charset="-122"/>
-                <a:cs typeface="Yu Gothic" pitchFamily="34" charset="-120"/>
-              </a:rPr>
-              <a:t>CTF</a:t>
-            </a:r>
-            <a:endParaRPr lang="en-US" sz="1400" dirty="0"/>
-          </a:p>
-        </p:txBody>
-      </p:sp>
-      <p:sp>
-        <p:nvSpPr>
-          <p:cNvPr id="14" name="Text 12"/>
-          <p:cNvSpPr/>
-          <p:nvPr/>
-        </p:nvSpPr>
-        <p:spPr>
-          <a:xfrm>
-            <a:off x="8214360" y="2368296"/>
-            <a:ext cx="3078480" cy="594360"/>
-          </a:xfrm>
-          <a:prstGeom prst="rect">
-            <a:avLst/>
-          </a:prstGeom>
-          <a:noFill/>
-          <a:ln/>
-        </p:spPr>
-        <p:txBody>
-          <a:bodyPr wrap="square" lIns="0" tIns="0" rIns="0" bIns="0" rtlCol="0" anchor="t"/>
-          <a:lstStyle/>
-          <a:p>
-            <a:pPr indent="0" marL="0">
-              <a:lnSpc>
-                <a:spcPts val="1600"/>
-              </a:lnSpc>
-              <a:buNone/>
-            </a:pPr>
-            <a:r>
-              <a:rPr lang="en-US" sz="1200" dirty="0">
-                <a:solidFill>
-                  <a:srgbClr val="5F6672"/>
-                </a:solidFill>
-                <a:latin typeface="Yu Gothic" pitchFamily="34" charset="0"/>
-                <a:ea typeface="Yu Gothic" pitchFamily="34" charset="-122"/>
-                <a:cs typeface="Yu Gothic" pitchFamily="34" charset="-120"/>
-              </a:rPr>
-              <a:t>SECCON（セキュリティ技術を競う競技会）　［要確認：現況］</a:t>
-            </a:r>
-            <a:endParaRPr lang="en-US" sz="1200" dirty="0"/>
-          </a:p>
-        </p:txBody>
-      </p:sp>
-      <p:sp>
-        <p:nvSpPr>
           <p:cNvPr id="15" name="Shape 13"/>
           <p:cNvSpPr/>
           <p:nvPr/>
         </p:nvSpPr>
         <p:spPr>
           <a:xfrm>
-            <a:off x="685800" y="3410712"/>
+            <a:off x="685800" y="3913632"/>
             <a:ext cx="10789920" cy="786384"/>
           </a:xfrm>
           <a:prstGeom prst="roundRect">
@@ -13929,7 +13929,7 @@
         </p:nvSpPr>
         <p:spPr>
           <a:xfrm>
-            <a:off x="914400" y="3538728"/>
+            <a:off x="914400" y="4041648"/>
             <a:ext cx="10332720" cy="292608"/>
           </a:xfrm>
           <a:prstGeom prst="rect">
@@ -13954,7 +13954,7 @@
                 <a:ea typeface="Yu Gothic" pitchFamily="34" charset="-122"/>
                 <a:cs typeface="Yu Gothic" pitchFamily="34" charset="-120"/>
               </a:rPr>
-              <a:t>この13回で重きを置いているところ</a:t>
+              <a:t>「作って試す」——研究室のやり方であり、この講義の組み方でもある</a:t>
             </a:r>
             <a:endParaRPr lang="en-US" sz="1500" dirty="0"/>
           </a:p>
@@ -13968,7 +13968,7 @@
         </p:nvSpPr>
         <p:spPr>
           <a:xfrm>
-            <a:off x="914400" y="3849624"/>
+            <a:off x="914400" y="4352544"/>
             <a:ext cx="10332720" cy="292608"/>
           </a:xfrm>
           <a:prstGeom prst="rect">
@@ -13993,7 +13993,7 @@
                 <a:ea typeface="Yu Gothic" pitchFamily="34" charset="-122"/>
                 <a:cs typeface="Yu Gothic" pitchFamily="34" charset="-120"/>
               </a:rPr>
-              <a:t>第12回（情報セキュリティ）と第13回（機械学習からLLM・エージェントAIへ）。前者は実務で関わってきた領域であり、後者はいま最も速く変わっている領域である。他の回も、そこにつながるように並べてある。</a:t>
+              <a:t>難しい理論だけでなく、実際に作って動かすことで理解を深める。この講義で毎回「手を動かして数値を出す問題」を1問入れているのも、同じ考えによる。</a:t>
             </a:r>
             <a:endParaRPr lang="en-US" sz="1250" dirty="0"/>
           </a:p>
@@ -14007,7 +14007,7 @@
         </p:nvSpPr>
         <p:spPr>
           <a:xfrm>
-            <a:off x="685800" y="5669280"/>
+            <a:off x="685800" y="5852160"/>
             <a:ext cx="10789920" cy="512064"/>
           </a:xfrm>
           <a:prstGeom prst="rect">
@@ -14035,7 +14035,7 @@
                 <a:ea typeface="Yu Gothic" pitchFamily="34" charset="-122"/>
                 <a:cs typeface="Yu Gothic" pitchFamily="34" charset="-120"/>
               </a:rPr>
-              <a:t>［要記入：話したいこと、持ち時間］</a:t>
+              <a:t>13回のうち重きを置いているのは第12回（情報セキュリティ）と第13回（機械学習からエージェントAIへ）。他の回も、そこにつながるように並べてある。</a:t>
             </a:r>
             <a:endParaRPr lang="en-US" sz="1300" dirty="0"/>
           </a:p>

--- a/slides/第01回_計算とは何か.pptx
+++ b/slides/第01回_計算とは何か.pptx
@@ -14118,7 +14118,7 @@
         <p:spPr>
           <a:xfrm>
             <a:off x="685800" y="1883664"/>
-            <a:ext cx="2526030" cy="1554480"/>
+            <a:ext cx="3444240" cy="1554480"/>
           </a:xfrm>
           <a:prstGeom prst="roundRect">
             <a:avLst>
@@ -14145,7 +14145,7 @@
         <p:spPr>
           <a:xfrm>
             <a:off x="868680" y="2020824"/>
-            <a:ext cx="2160270" cy="310896"/>
+            <a:ext cx="3078480" cy="310896"/>
           </a:xfrm>
           <a:prstGeom prst="rect">
             <a:avLst/>
@@ -14184,7 +14184,7 @@
         <p:spPr>
           <a:xfrm>
             <a:off x="868680" y="2368296"/>
-            <a:ext cx="2160270" cy="914400"/>
+            <a:ext cx="3078480" cy="914400"/>
           </a:xfrm>
           <a:prstGeom prst="rect">
             <a:avLst/>
@@ -14225,8 +14225,8 @@
         </p:nvSpPr>
         <p:spPr>
           <a:xfrm>
-            <a:off x="3440430" y="1883664"/>
-            <a:ext cx="2526030" cy="1554480"/>
+            <a:off x="4358640" y="1883664"/>
+            <a:ext cx="3444240" cy="1554480"/>
           </a:xfrm>
           <a:prstGeom prst="roundRect">
             <a:avLst>
@@ -14252,8 +14252,8 @@
         </p:nvSpPr>
         <p:spPr>
           <a:xfrm>
-            <a:off x="3623310" y="2020824"/>
-            <a:ext cx="2160270" cy="310896"/>
+            <a:off x="4541520" y="2020824"/>
+            <a:ext cx="3078480" cy="310896"/>
           </a:xfrm>
           <a:prstGeom prst="rect">
             <a:avLst/>
@@ -14277,7 +14277,7 @@
                 <a:ea typeface="Yu Gothic" pitchFamily="34" charset="-122"/>
                 <a:cs typeface="Yu Gothic" pitchFamily="34" charset="-120"/>
               </a:rPr>
-              <a:t>実務</a:t>
+              <a:t>CTF</a:t>
             </a:r>
             <a:endParaRPr lang="en-US" sz="1400" dirty="0"/>
           </a:p>
@@ -14291,8 +14291,8 @@
         </p:nvSpPr>
         <p:spPr>
           <a:xfrm>
-            <a:off x="3623310" y="2368296"/>
-            <a:ext cx="2160270" cy="914400"/>
+            <a:off x="4541520" y="2368296"/>
+            <a:ext cx="3078480" cy="914400"/>
           </a:xfrm>
           <a:prstGeom prst="rect">
             <a:avLst/>
@@ -14319,7 +14319,7 @@
                 <a:ea typeface="Yu Gothic" pitchFamily="34" charset="-122"/>
                 <a:cs typeface="Yu Gothic" pitchFamily="34" charset="-120"/>
               </a:rPr>
-              <a:t>福岡県警察 サイバー犯罪対策テクニカルアドバイザー　［要確認：現況］</a:t>
+              <a:t>学生とチームを組んで参加している</a:t>
             </a:r>
             <a:endParaRPr lang="en-US" sz="1200" dirty="0"/>
           </a:p>
@@ -14333,8 +14333,8 @@
         </p:nvSpPr>
         <p:spPr>
           <a:xfrm>
-            <a:off x="6195060" y="1883664"/>
-            <a:ext cx="2526030" cy="1554480"/>
+            <a:off x="8031480" y="1883664"/>
+            <a:ext cx="3444240" cy="1554480"/>
           </a:xfrm>
           <a:prstGeom prst="roundRect">
             <a:avLst>
@@ -14360,8 +14360,8 @@
         </p:nvSpPr>
         <p:spPr>
           <a:xfrm>
-            <a:off x="6377940" y="2020824"/>
-            <a:ext cx="2160270" cy="310896"/>
+            <a:off x="8214360" y="2020824"/>
+            <a:ext cx="3078480" cy="310896"/>
           </a:xfrm>
           <a:prstGeom prst="rect">
             <a:avLst/>
@@ -14385,7 +14385,7 @@
                 <a:ea typeface="Yu Gothic" pitchFamily="34" charset="-122"/>
                 <a:cs typeface="Yu Gothic" pitchFamily="34" charset="-120"/>
               </a:rPr>
-              <a:t>CTF</a:t>
+              <a:t>教育</a:t>
             </a:r>
             <a:endParaRPr lang="en-US" sz="1400" dirty="0"/>
           </a:p>
@@ -14399,8 +14399,8 @@
         </p:nvSpPr>
         <p:spPr>
           <a:xfrm>
-            <a:off x="6377940" y="2368296"/>
-            <a:ext cx="2160270" cy="914400"/>
+            <a:off x="8214360" y="2368296"/>
+            <a:ext cx="3078480" cy="914400"/>
           </a:xfrm>
           <a:prstGeom prst="rect">
             <a:avLst/>
@@ -14427,7 +14427,7 @@
                 <a:ea typeface="Yu Gothic" pitchFamily="34" charset="-122"/>
                 <a:cs typeface="Yu Gothic" pitchFamily="34" charset="-120"/>
               </a:rPr>
-              <a:t>学生とチームを組んで参加している</a:t>
+              <a:t>九州大学で9年目。学生の指導歴は24年になる</a:t>
             </a:r>
             <a:endParaRPr lang="en-US" sz="1200" dirty="0"/>
           </a:p>
@@ -14436,114 +14436,6 @@
       <p:sp>
         <p:nvSpPr>
           <p:cNvPr id="15" name="Shape 13"/>
-          <p:cNvSpPr/>
-          <p:nvPr/>
-        </p:nvSpPr>
-        <p:spPr>
-          <a:xfrm>
-            <a:off x="8949690" y="1883664"/>
-            <a:ext cx="2526030" cy="1554480"/>
-          </a:xfrm>
-          <a:prstGeom prst="roundRect">
-            <a:avLst>
-              <a:gd name="adj" fmla="val 3529"/>
-            </a:avLst>
-          </a:prstGeom>
-          <a:solidFill>
-            <a:srgbClr val="EEF1F5"/>
-          </a:solidFill>
-          <a:ln w="12700">
-            <a:solidFill>
-              <a:srgbClr val="DDE4EC"/>
-            </a:solidFill>
-            <a:prstDash val="solid"/>
-          </a:ln>
-        </p:spPr>
-      </p:sp>
-      <p:sp>
-        <p:nvSpPr>
-          <p:cNvPr id="16" name="Text 14"/>
-          <p:cNvSpPr/>
-          <p:nvPr/>
-        </p:nvSpPr>
-        <p:spPr>
-          <a:xfrm>
-            <a:off x="9132570" y="2020824"/>
-            <a:ext cx="2160270" cy="310896"/>
-          </a:xfrm>
-          <a:prstGeom prst="rect">
-            <a:avLst/>
-          </a:prstGeom>
-          <a:noFill/>
-          <a:ln/>
-        </p:spPr>
-        <p:txBody>
-          <a:bodyPr wrap="square" lIns="0" tIns="0" rIns="0" bIns="0" rtlCol="0" anchor="ctr"/>
-          <a:lstStyle/>
-          <a:p>
-            <a:pPr indent="0" marL="0">
-              <a:buNone/>
-            </a:pPr>
-            <a:r>
-              <a:rPr lang="en-US" sz="1400" b="1" dirty="0">
-                <a:solidFill>
-                  <a:srgbClr val="16191D"/>
-                </a:solidFill>
-                <a:latin typeface="Yu Gothic" pitchFamily="34" charset="0"/>
-                <a:ea typeface="Yu Gothic" pitchFamily="34" charset="-122"/>
-                <a:cs typeface="Yu Gothic" pitchFamily="34" charset="-120"/>
-              </a:rPr>
-              <a:t>教育</a:t>
-            </a:r>
-            <a:endParaRPr lang="en-US" sz="1400" dirty="0"/>
-          </a:p>
-        </p:txBody>
-      </p:sp>
-      <p:sp>
-        <p:nvSpPr>
-          <p:cNvPr id="17" name="Text 15"/>
-          <p:cNvSpPr/>
-          <p:nvPr/>
-        </p:nvSpPr>
-        <p:spPr>
-          <a:xfrm>
-            <a:off x="9132570" y="2368296"/>
-            <a:ext cx="2160270" cy="914400"/>
-          </a:xfrm>
-          <a:prstGeom prst="rect">
-            <a:avLst/>
-          </a:prstGeom>
-          <a:noFill/>
-          <a:ln/>
-        </p:spPr>
-        <p:txBody>
-          <a:bodyPr wrap="square" lIns="0" tIns="0" rIns="0" bIns="0" rtlCol="0" anchor="t"/>
-          <a:lstStyle/>
-          <a:p>
-            <a:pPr indent="0" marL="0">
-              <a:lnSpc>
-                <a:spcPts val="1600"/>
-              </a:lnSpc>
-              <a:buNone/>
-            </a:pPr>
-            <a:r>
-              <a:rPr lang="en-US" sz="1200" dirty="0">
-                <a:solidFill>
-                  <a:srgbClr val="5F6672"/>
-                </a:solidFill>
-                <a:latin typeface="Yu Gothic" pitchFamily="34" charset="0"/>
-                <a:ea typeface="Yu Gothic" pitchFamily="34" charset="-122"/>
-                <a:cs typeface="Yu Gothic" pitchFamily="34" charset="-120"/>
-              </a:rPr>
-              <a:t>九州大学で9年目。学生の指導歴は24年になる</a:t>
-            </a:r>
-            <a:endParaRPr lang="en-US" sz="1200" dirty="0"/>
-          </a:p>
-        </p:txBody>
-      </p:sp>
-      <p:sp>
-        <p:nvSpPr>
-          <p:cNvPr id="18" name="Shape 16"/>
           <p:cNvSpPr/>
           <p:nvPr/>
         </p:nvSpPr>
@@ -14570,7 +14462,7 @@
       </p:sp>
       <p:sp>
         <p:nvSpPr>
-          <p:cNvPr id="19" name="Text 17"/>
+          <p:cNvPr id="16" name="Text 14"/>
           <p:cNvSpPr/>
           <p:nvPr/>
         </p:nvSpPr>
@@ -14609,7 +14501,7 @@
       </p:sp>
       <p:sp>
         <p:nvSpPr>
-          <p:cNvPr id="20" name="Text 18"/>
+          <p:cNvPr id="17" name="Text 15"/>
           <p:cNvSpPr/>
           <p:nvPr/>
         </p:nvSpPr>
@@ -14648,7 +14540,7 @@
       </p:sp>
       <p:sp>
         <p:nvSpPr>
-          <p:cNvPr id="21" name="Text 19"/>
+          <p:cNvPr id="18" name="Text 16"/>
           <p:cNvSpPr/>
           <p:nvPr/>
         </p:nvSpPr>
@@ -25310,7 +25202,7 @@
                 <a:ea typeface="Yu Gothic" pitchFamily="34" charset="-122"/>
                 <a:cs typeface="Yu Gothic" pitchFamily="34" charset="-120"/>
               </a:rPr>
-              <a:t>［要記入：教科書・参考書］</a:t>
+              <a:t>教科書・参考書は指定しない。講義資料と演習で完結する。</a:t>
             </a:r>
             <a:endParaRPr lang="en-US" sz="1300" dirty="0"/>
           </a:p>
@@ -25864,7 +25756,7 @@
                 <a:ea typeface="Yu Gothic" pitchFamily="34" charset="-122"/>
                 <a:cs typeface="Yu Gothic" pitchFamily="34" charset="-120"/>
               </a:rPr>
-              <a:t>［要記入：分量］</a:t>
+              <a:t>分量は200文字以上。</a:t>
             </a:r>
             <a:endParaRPr lang="en-US" sz="1300" dirty="0"/>
           </a:p>

--- a/slides/第01回_計算とは何か.pptx
+++ b/slides/第01回_計算とは何か.pptx
@@ -21852,6 +21852,26 @@
             </a:r>
             <a:endParaRPr lang="en-US" sz="1300" dirty="0"/>
           </a:p>
+          <a:p>
+            <a:pPr indent="0" marL="0">
+              <a:lnSpc>
+                <a:spcPts val="2000"/>
+              </a:lnSpc>
+              <a:buNone/>
+            </a:pPr>
+            <a:r>
+              <a:rPr lang="en-US" sz="1300" dirty="0">
+                <a:solidFill>
+                  <a:srgbClr val="5F6672"/>
+                </a:solidFill>
+                <a:latin typeface="Yu Gothic" pitchFamily="34" charset="0"/>
+                <a:ea typeface="Yu Gothic" pitchFamily="34" charset="-122"/>
+                <a:cs typeface="Yu Gothic" pitchFamily="34" charset="-120"/>
+              </a:rPr>
+              <a:t>研究室紹介の動画　https://youtu.be/SszCCza6PEM</a:t>
+            </a:r>
+            <a:endParaRPr lang="en-US" sz="1300" dirty="0"/>
+          </a:p>
         </p:txBody>
       </p:sp>
       <p:sp>
@@ -24630,7 +24650,7 @@
                           <a:ea typeface="Yu Gothic" pitchFamily="34" charset="-122"/>
                           <a:cs typeface="Yu Gothic" pitchFamily="34" charset="-120"/>
                         </a:rPr>
-                        <a:t>［要記入］</a:t>
+                        <a:t>出題から1週間以内</a:t>
                       </a:r>
                       <a:endParaRPr lang="en-US" sz="1300" dirty="0">
                         <a:latin typeface="Yu Gothic" charset="0"/>

--- a/slides/第01回_計算とは何か.pptx
+++ b/slides/第01回_計算とは何か.pptx
@@ -19916,45 +19916,6 @@
         </p:nvSpPr>
         <p:spPr>
           <a:xfrm>
-            <a:off x="685800" y="5687568"/>
-            <a:ext cx="10789920" cy="365760"/>
-          </a:xfrm>
-          <a:prstGeom prst="rect">
-            <a:avLst/>
-          </a:prstGeom>
-          <a:noFill/>
-          <a:ln/>
-        </p:spPr>
-        <p:txBody>
-          <a:bodyPr wrap="square" lIns="0" tIns="0" rIns="0" bIns="0" rtlCol="0" anchor="ctr"/>
-          <a:lstStyle/>
-          <a:p>
-            <a:pPr algn="ctr" indent="0" marL="0">
-              <a:buNone/>
-            </a:pPr>
-            <a:r>
-              <a:rPr lang="en-US" sz="1500" dirty="0">
-                <a:solidFill>
-                  <a:srgbClr val="16191D"/>
-                </a:solidFill>
-                <a:latin typeface="Yu Gothic" pitchFamily="34" charset="0"/>
-                <a:ea typeface="Yu Gothic" pitchFamily="34" charset="-122"/>
-                <a:cs typeface="Yu Gothic" pitchFamily="34" charset="-120"/>
-              </a:rPr>
-              <a:t>対角線をすべて反転させたものが trouble の振る舞い。どの行とも1マス以上食い違う。</a:t>
-            </a:r>
-            <a:endParaRPr lang="en-US" sz="1500" dirty="0"/>
-          </a:p>
-        </p:txBody>
-      </p:sp>
-      <p:sp>
-        <p:nvSpPr>
-          <p:cNvPr id="7" name="Text 4"/>
-          <p:cNvSpPr/>
-          <p:nvPr/>
-        </p:nvSpPr>
-        <p:spPr>
-          <a:xfrm>
             <a:off x="685800" y="6071616"/>
             <a:ext cx="10789920" cy="640080"/>
           </a:xfrm>

--- a/slides/第01回_計算とは何か.pptx
+++ b/slides/第01回_計算とは何か.pptx
@@ -22236,7 +22236,7 @@
                 <a:ea typeface="Yu Gothic" pitchFamily="34" charset="-122"/>
                 <a:cs typeface="Yu Gothic" pitchFamily="34" charset="-120"/>
               </a:rPr>
-              <a:t>テープ上の文字列に含まれる 1 の個数が偶数なら Y、奇数なら N を書いて停止するチューリングマシンの遷移規則表を作れ。（ヒント：状態は2つで足りる）</a:t>
+              <a:t>テープ上の文字列に含まれる 1 の個数が偶数なら Y、奇数なら N を、右端の次の空白のマスに書いて停止するチューリングマシンの遷移規則表を作れ。（ヒント：状態は2つで足りる）</a:t>
             </a:r>
             <a:endParaRPr lang="en-US" sz="1400" dirty="0"/>
           </a:p>
